--- a/ppt/算法讲解189【挺难】强连通分量和缩点-上.pptx
+++ b/ppt/算法讲解189【挺难】强连通分量和缩点-上.pptx
@@ -5867,25 +5867,8 @@
               </a:defRPr>
             </a:pPr>
             <a:r>
-              <a:t>缩点后的建出DAG图，判断是否为一条链</a:t>
-            </a:r>
-          </a:p>
-          <a:p>
-            <a:pPr algn="l" defTabSz="457200">
-              <a:defRPr sz="3600">
-                <a:solidFill>
-                  <a:schemeClr val="accent5">
-                    <a:hueOff val="-82419"/>
-                    <a:satOff val="-9513"/>
-                    <a:lumOff val="-16343"/>
-                  </a:schemeClr>
-                </a:solidFill>
-                <a:latin typeface="Monaco"/>
-                <a:ea typeface="Monaco"/>
-                <a:cs typeface="Monaco"/>
-                <a:sym typeface="Monaco"/>
-              </a:defRPr>
-            </a:pPr>
+              <a:t>缩点后的建出DAG图，判断拓扑排序过程中，队列里一直只有一个点，也就是不存在相互独立的点</a:t>
+            </a:r>
           </a:p>
         </p:txBody>
       </p:sp>
